--- a/test-corpus/word-verification/mindmap.pptx
+++ b/test-corpus/word-verification/mindmap.pptx
@@ -144,7 +144,7 @@
         </p:nvCxnSpPr>
         <p:spPr>
           <a:xfrm>
-            <a:off x="6604413" y="4098110"/>
+            <a:off x="4483005" y="4098110"/>
             <a:ext cx="670127" cy="773368"/>
           </a:xfrm>
           <a:prstGeom prst="line">
@@ -165,7 +165,7 @@
         </p:nvCxnSpPr>
         <p:spPr>
           <a:xfrm flipV="1">
-            <a:off x="7274540" y="4674711"/>
+            <a:off x="5153132" y="4674711"/>
             <a:ext cx="1293595" cy="196767"/>
           </a:xfrm>
           <a:prstGeom prst="line">
@@ -186,7 +186,7 @@
         </p:nvCxnSpPr>
         <p:spPr>
           <a:xfrm>
-            <a:off x="7274540" y="4871478"/>
+            <a:off x="5153132" y="4871478"/>
             <a:ext cx="670127" cy="773368"/>
           </a:xfrm>
           <a:prstGeom prst="line">
@@ -207,7 +207,7 @@
         </p:nvCxnSpPr>
         <p:spPr>
           <a:xfrm flipV="1">
-            <a:off x="6895678" y="4871478"/>
+            <a:off x="4774270" y="4871478"/>
             <a:ext cx="378862" cy="1252425"/>
           </a:xfrm>
           <a:prstGeom prst="line">
@@ -228,7 +228,7 @@
         </p:nvCxnSpPr>
         <p:spPr>
           <a:xfrm flipV="1">
-            <a:off x="5743547" y="4098110"/>
+            <a:off x="3622139" y="4098110"/>
             <a:ext cx="860866" cy="553244"/>
           </a:xfrm>
           <a:prstGeom prst="line">
@@ -249,7 +249,7 @@
         </p:nvCxnSpPr>
         <p:spPr>
           <a:xfrm>
-            <a:off x="5743547" y="4651354"/>
+            <a:off x="3622139" y="4651354"/>
             <a:ext cx="10667" cy="1308432"/>
           </a:xfrm>
           <a:prstGeom prst="line">
@@ -270,7 +270,7 @@
         </p:nvCxnSpPr>
         <p:spPr>
           <a:xfrm flipV="1">
-            <a:off x="4640690" y="4651354"/>
+            <a:off x="2519282" y="4651354"/>
             <a:ext cx="1102857" cy="23357"/>
           </a:xfrm>
           <a:prstGeom prst="line">
@@ -291,7 +291,7 @@
         </p:nvCxnSpPr>
         <p:spPr>
           <a:xfrm flipV="1">
-            <a:off x="4021817" y="4674711"/>
+            <a:off x="1900409" y="4674711"/>
             <a:ext cx="618873" cy="1083133"/>
           </a:xfrm>
           <a:prstGeom prst="line">
@@ -312,7 +312,7 @@
         </p:nvCxnSpPr>
         <p:spPr>
           <a:xfrm>
-            <a:off x="3534475" y="4098110"/>
+            <a:off x="1413067" y="4098110"/>
             <a:ext cx="1106215" cy="576601"/>
           </a:xfrm>
           <a:prstGeom prst="line">
@@ -333,7 +333,7 @@
         </p:nvCxnSpPr>
         <p:spPr>
           <a:xfrm>
-            <a:off x="6179313" y="3167272"/>
+            <a:off x="4057905" y="3167272"/>
             <a:ext cx="425100" cy="930838"/>
           </a:xfrm>
           <a:prstGeom prst="line">
@@ -354,7 +354,7 @@
         </p:nvCxnSpPr>
         <p:spPr>
           <a:xfrm>
-            <a:off x="5264158" y="2551374"/>
+            <a:off x="3142750" y="2551374"/>
             <a:ext cx="915155" cy="615898"/>
           </a:xfrm>
           <a:prstGeom prst="line">
@@ -375,7 +375,7 @@
         </p:nvCxnSpPr>
         <p:spPr>
           <a:xfrm>
-            <a:off x="4021817" y="2438376"/>
+            <a:off x="1900409" y="2438376"/>
             <a:ext cx="1242341" cy="112998"/>
           </a:xfrm>
           <a:prstGeom prst="line">
@@ -396,7 +396,7 @@
         </p:nvCxnSpPr>
         <p:spPr>
           <a:xfrm flipV="1">
-            <a:off x="5264158" y="1305596"/>
+            <a:off x="3142750" y="1305596"/>
             <a:ext cx="64957" cy="1245778"/>
           </a:xfrm>
           <a:prstGeom prst="line">
@@ -417,7 +417,7 @@
         </p:nvCxnSpPr>
         <p:spPr>
           <a:xfrm flipV="1">
-            <a:off x="6179313" y="2072316"/>
+            <a:off x="4057905" y="2072316"/>
             <a:ext cx="716365" cy="1094956"/>
           </a:xfrm>
           <a:prstGeom prst="line">
@@ -438,7 +438,7 @@
         </p:nvCxnSpPr>
         <p:spPr>
           <a:xfrm flipV="1">
-            <a:off x="6604413" y="3544865"/>
+            <a:off x="4483005" y="3544865"/>
             <a:ext cx="860865" cy="553245"/>
           </a:xfrm>
           <a:prstGeom prst="line">
@@ -459,7 +459,7 @@
         </p:nvCxnSpPr>
         <p:spPr>
           <a:xfrm flipV="1">
-            <a:off x="7465278" y="2551374"/>
+            <a:off x="5343870" y="2551374"/>
             <a:ext cx="479389" cy="993491"/>
           </a:xfrm>
           <a:prstGeom prst="line">
@@ -480,7 +480,7 @@
         </p:nvCxnSpPr>
         <p:spPr>
           <a:xfrm flipV="1">
-            <a:off x="7465278" y="3521509"/>
+            <a:off x="5343870" y="3521509"/>
             <a:ext cx="1102857" cy="23356"/>
           </a:xfrm>
           <a:prstGeom prst="line">
@@ -501,7 +501,7 @@
         </p:nvSpPr>
         <p:spPr>
           <a:xfrm>
-            <a:off x="6000297" y="3953642"/>
+            <a:off x="3878889" y="3953642"/>
             <a:ext cx="1208231" cy="288935"/>
           </a:xfrm>
           <a:prstGeom prst="ellipse">
@@ -563,7 +563,7 @@
         </p:nvSpPr>
         <p:spPr>
           <a:xfrm>
-            <a:off x="6974469" y="4775166"/>
+            <a:off x="4853061" y="4775166"/>
             <a:ext cx="600143" cy="192624"/>
           </a:xfrm>
           <a:prstGeom prst="roundRect">
@@ -625,7 +625,7 @@
         </p:nvSpPr>
         <p:spPr>
           <a:xfrm>
-            <a:off x="8168441" y="4578399"/>
+            <a:off x="6047033" y="4578399"/>
             <a:ext cx="799388" cy="192624"/>
           </a:xfrm>
           <a:prstGeom prst="roundRect">
@@ -687,7 +687,7 @@
         </p:nvSpPr>
         <p:spPr>
           <a:xfrm>
-            <a:off x="7505245" y="5548534"/>
+            <a:off x="5383837" y="5548534"/>
             <a:ext cx="878845" cy="192624"/>
           </a:xfrm>
           <a:prstGeom prst="roundRect">
@@ -749,7 +749,7 @@
         </p:nvSpPr>
         <p:spPr>
           <a:xfrm>
-            <a:off x="6495984" y="6027592"/>
+            <a:off x="4374576" y="6027592"/>
             <a:ext cx="799388" cy="192624"/>
           </a:xfrm>
           <a:prstGeom prst="roundRect">
@@ -811,7 +811,7 @@
         </p:nvSpPr>
         <p:spPr>
           <a:xfrm>
-            <a:off x="5490428" y="4555043"/>
+            <a:off x="3369020" y="4555043"/>
             <a:ext cx="506239" cy="192624"/>
           </a:xfrm>
           <a:prstGeom prst="roundRect">
@@ -873,7 +873,7 @@
         </p:nvSpPr>
         <p:spPr>
           <a:xfrm>
-            <a:off x="5443909" y="5863474"/>
+            <a:off x="3322501" y="5863474"/>
             <a:ext cx="620609" cy="192624"/>
           </a:xfrm>
           <a:prstGeom prst="rect">
@@ -935,7 +935,7 @@
         </p:nvSpPr>
         <p:spPr>
           <a:xfrm>
-            <a:off x="4259205" y="4578399"/>
+            <a:off x="2137797" y="4578399"/>
             <a:ext cx="762970" cy="192624"/>
           </a:xfrm>
           <a:prstGeom prst="cloud">
@@ -997,7 +997,7 @@
         </p:nvSpPr>
         <p:spPr>
           <a:xfrm>
-            <a:off x="3790970" y="5661532"/>
+            <a:off x="1669562" y="5661532"/>
             <a:ext cx="461695" cy="192624"/>
           </a:xfrm>
           <a:prstGeom prst="roundRect">
@@ -1059,7 +1059,7 @@
         </p:nvSpPr>
         <p:spPr>
           <a:xfrm>
-            <a:off x="3224171" y="4001798"/>
+            <a:off x="1102763" y="4001798"/>
             <a:ext cx="620609" cy="192624"/>
           </a:xfrm>
           <a:prstGeom prst="roundRect">
@@ -1121,7 +1121,7 @@
         </p:nvSpPr>
         <p:spPr>
           <a:xfrm>
-            <a:off x="5717062" y="3070960"/>
+            <a:off x="3595654" y="3070960"/>
             <a:ext cx="924503" cy="192624"/>
           </a:xfrm>
           <a:prstGeom prst="hexagon">
@@ -1183,7 +1183,7 @@
         </p:nvSpPr>
         <p:spPr>
           <a:xfrm>
-            <a:off x="5013447" y="2455062"/>
+            <a:off x="2892039" y="2455062"/>
             <a:ext cx="501423" cy="192624"/>
           </a:xfrm>
           <a:prstGeom prst="roundRect">
@@ -1245,7 +1245,7 @@
         </p:nvSpPr>
         <p:spPr>
           <a:xfrm>
-            <a:off x="3841232" y="2342065"/>
+            <a:off x="1719824" y="2342065"/>
             <a:ext cx="361169" cy="192624"/>
           </a:xfrm>
           <a:prstGeom prst="roundRect">
@@ -1307,7 +1307,7 @@
         </p:nvSpPr>
         <p:spPr>
           <a:xfrm>
-            <a:off x="5058539" y="1209285"/>
+            <a:off x="2937131" y="1209285"/>
             <a:ext cx="541152" cy="192624"/>
           </a:xfrm>
           <a:prstGeom prst="roundRect">
@@ -1369,7 +1369,7 @@
         </p:nvSpPr>
         <p:spPr>
           <a:xfrm>
-            <a:off x="6625102" y="1976005"/>
+            <a:off x="4503694" y="1976005"/>
             <a:ext cx="541152" cy="192624"/>
           </a:xfrm>
           <a:prstGeom prst="roundRect">
@@ -1431,7 +1431,7 @@
         </p:nvSpPr>
         <p:spPr>
           <a:xfrm>
-            <a:off x="7212159" y="3448554"/>
+            <a:off x="5090751" y="3448554"/>
             <a:ext cx="506239" cy="192624"/>
           </a:xfrm>
           <a:prstGeom prst="roundRect">
@@ -1493,7 +1493,7 @@
         </p:nvSpPr>
         <p:spPr>
           <a:xfrm>
-            <a:off x="7490347" y="2455062"/>
+            <a:off x="5368939" y="2455062"/>
             <a:ext cx="908641" cy="192624"/>
           </a:xfrm>
           <a:prstGeom prst="irregularSeal2">
@@ -1555,7 +1555,7 @@
         </p:nvSpPr>
         <p:spPr>
           <a:xfrm>
-            <a:off x="8317424" y="3425197"/>
+            <a:off x="6196016" y="3425197"/>
             <a:ext cx="501423" cy="192624"/>
           </a:xfrm>
           <a:prstGeom prst="roundRect">
@@ -1605,6 +1605,283 @@
                 </a:solidFill>
               </a:rPr>
               <a:t>Support</a:t>
+            </a:r>
+          </a:p>
+        </p:txBody>
+      </p:sp>
+      <p:sp>
+        <p:nvSpPr>
+          <p:cNvPr id="4" name="Mermaid source"/>
+          <p:cNvSpPr/>
+          <p:nvPr/>
+        </p:nvSpPr>
+        <p:spPr>
+          <a:xfrm>
+            <a:off x="7674864" y="1028700"/>
+            <a:ext cx="4059936" cy="5372100"/>
+          </a:xfrm>
+          <a:prstGeom prst="rect">
+            <a:avLst/>
+          </a:prstGeom>
+          <a:solidFill>
+            <a:srgbClr val="F3F4F6"/>
+          </a:solidFill>
+          <a:ln w="9525">
+            <a:solidFill>
+              <a:srgbClr val="D1D5DB"/>
+            </a:solidFill>
+          </a:ln>
+        </p:spPr>
+        <p:txBody>
+          <a:bodyPr wrap="square" lIns="91440" tIns="45720" rIns="91440" bIns="45720" anchor="t">
+            <a:noAutofit/>
+          </a:bodyPr>
+          <a:lstStyle/>
+          <a:p>
+            <a:pPr algn="l"/>
+            <a:r>
+              <a:rPr lang="en-US" sz="1400" dirty="0">
+                <a:solidFill>
+                  <a:srgbClr val="1F2937"/>
+                </a:solidFill>
+                <a:latin typeface="Consolas"/>
+                <a:cs typeface="Consolas"/>
+              </a:rPr>
+              <a:t>mindmap</a:t>
+            </a:r>
+          </a:p>
+          <a:p>
+            <a:pPr algn="l"/>
+            <a:r>
+              <a:rPr lang="en-US" sz="1400" dirty="0">
+                <a:solidFill>
+                  <a:srgbClr val="1F2937"/>
+                </a:solidFill>
+                <a:latin typeface="Consolas"/>
+                <a:cs typeface="Consolas"/>
+              </a:rPr>
+              <a:t>  root((Project Plan))</a:t>
+            </a:r>
+          </a:p>
+          <a:p>
+            <a:pPr algn="l"/>
+            <a:r>
+              <a:rPr lang="en-US" sz="1400" dirty="0">
+                <a:solidFill>
+                  <a:srgbClr val="1F2937"/>
+                </a:solidFill>
+                <a:latin typeface="Consolas"/>
+                <a:cs typeface="Consolas"/>
+              </a:rPr>
+              <a:t>    Research</a:t>
+            </a:r>
+          </a:p>
+          <a:p>
+            <a:pPr algn="l"/>
+            <a:r>
+              <a:rPr lang="en-US" sz="1400" dirty="0">
+                <a:solidFill>
+                  <a:srgbClr val="1F2937"/>
+                </a:solidFill>
+                <a:latin typeface="Consolas"/>
+                <a:cs typeface="Consolas"/>
+              </a:rPr>
+              <a:t>      Market analysis</a:t>
+            </a:r>
+          </a:p>
+          <a:p>
+            <a:pPr algn="l"/>
+            <a:r>
+              <a:rPr lang="en-US" sz="1400" dirty="0">
+                <a:solidFill>
+                  <a:srgbClr val="1F2937"/>
+                </a:solidFill>
+                <a:latin typeface="Consolas"/>
+                <a:cs typeface="Consolas"/>
+              </a:rPr>
+              <a:t>      Competitor review</a:t>
+            </a:r>
+          </a:p>
+          <a:p>
+            <a:pPr algn="l"/>
+            <a:r>
+              <a:rPr lang="en-US" sz="1400" dirty="0">
+                <a:solidFill>
+                  <a:srgbClr val="1F2937"/>
+                </a:solidFill>
+                <a:latin typeface="Consolas"/>
+                <a:cs typeface="Consolas"/>
+              </a:rPr>
+              <a:t>      User interviews</a:t>
+            </a:r>
+          </a:p>
+          <a:p>
+            <a:pPr algn="l"/>
+            <a:r>
+              <a:rPr lang="en-US" sz="1400" dirty="0">
+                <a:solidFill>
+                  <a:srgbClr val="1F2937"/>
+                </a:solidFill>
+                <a:latin typeface="Consolas"/>
+                <a:cs typeface="Consolas"/>
+              </a:rPr>
+              <a:t>    Design</a:t>
+            </a:r>
+          </a:p>
+          <a:p>
+            <a:pPr algn="l"/>
+            <a:r>
+              <a:rPr lang="en-US" sz="1400" dirty="0">
+                <a:solidFill>
+                  <a:srgbClr val="1F2937"/>
+                </a:solidFill>
+                <a:latin typeface="Consolas"/>
+                <a:cs typeface="Consolas"/>
+              </a:rPr>
+              <a:t>      [Wireframes]</a:t>
+            </a:r>
+          </a:p>
+          <a:p>
+            <a:pPr algn="l"/>
+            <a:r>
+              <a:rPr lang="en-US" sz="1400" dirty="0">
+                <a:solidFill>
+                  <a:srgbClr val="1F2937"/>
+                </a:solidFill>
+                <a:latin typeface="Consolas"/>
+                <a:cs typeface="Consolas"/>
+              </a:rPr>
+              <a:t>      )Moodboard(</a:t>
+            </a:r>
+          </a:p>
+          <a:p>
+            <a:pPr algn="l"/>
+            <a:r>
+              <a:rPr lang="en-US" sz="1400" dirty="0">
+                <a:solidFill>
+                  <a:srgbClr val="1F2937"/>
+                </a:solidFill>
+                <a:latin typeface="Consolas"/>
+                <a:cs typeface="Consolas"/>
+              </a:rPr>
+              <a:t>        Colors</a:t>
+            </a:r>
+          </a:p>
+          <a:p>
+            <a:pPr algn="l"/>
+            <a:r>
+              <a:rPr lang="en-US" sz="1400" dirty="0">
+                <a:solidFill>
+                  <a:srgbClr val="1F2937"/>
+                </a:solidFill>
+                <a:latin typeface="Consolas"/>
+                <a:cs typeface="Consolas"/>
+              </a:rPr>
+              <a:t>        Typography</a:t>
+            </a:r>
+          </a:p>
+          <a:p>
+            <a:pPr algn="l"/>
+            <a:r>
+              <a:rPr lang="en-US" sz="1400" dirty="0">
+                <a:solidFill>
+                  <a:srgbClr val="1F2937"/>
+                </a:solidFill>
+                <a:latin typeface="Consolas"/>
+                <a:cs typeface="Consolas"/>
+              </a:rPr>
+              <a:t>    {{Engineering}}</a:t>
+            </a:r>
+          </a:p>
+          <a:p>
+            <a:pPr algn="l"/>
+            <a:r>
+              <a:rPr lang="en-US" sz="1400" dirty="0">
+                <a:solidFill>
+                  <a:srgbClr val="1F2937"/>
+                </a:solidFill>
+                <a:latin typeface="Consolas"/>
+                <a:cs typeface="Consolas"/>
+              </a:rPr>
+              <a:t>      (Backend)</a:t>
+            </a:r>
+          </a:p>
+          <a:p>
+            <a:pPr algn="l"/>
+            <a:r>
+              <a:rPr lang="en-US" sz="1400" dirty="0">
+                <a:solidFill>
+                  <a:srgbClr val="1F2937"/>
+                </a:solidFill>
+                <a:latin typeface="Consolas"/>
+                <a:cs typeface="Consolas"/>
+              </a:rPr>
+              <a:t>        API</a:t>
+            </a:r>
+          </a:p>
+          <a:p>
+            <a:pPr algn="l"/>
+            <a:r>
+              <a:rPr lang="en-US" sz="1400" dirty="0">
+                <a:solidFill>
+                  <a:srgbClr val="1F2937"/>
+                </a:solidFill>
+                <a:latin typeface="Consolas"/>
+                <a:cs typeface="Consolas"/>
+              </a:rPr>
+              <a:t>        Database</a:t>
+            </a:r>
+          </a:p>
+          <a:p>
+            <a:pPr algn="l"/>
+            <a:r>
+              <a:rPr lang="en-US" sz="1400" dirty="0">
+                <a:solidFill>
+                  <a:srgbClr val="1F2937"/>
+                </a:solidFill>
+                <a:latin typeface="Consolas"/>
+                <a:cs typeface="Consolas"/>
+              </a:rPr>
+              <a:t>      Frontend</a:t>
+            </a:r>
+          </a:p>
+          <a:p>
+            <a:pPr algn="l"/>
+            <a:r>
+              <a:rPr lang="en-US" sz="1400" dirty="0">
+                <a:solidFill>
+                  <a:srgbClr val="1F2937"/>
+                </a:solidFill>
+                <a:latin typeface="Consolas"/>
+                <a:cs typeface="Consolas"/>
+              </a:rPr>
+              <a:t>    Launch</a:t>
+            </a:r>
+          </a:p>
+          <a:p>
+            <a:pPr algn="l"/>
+            <a:r>
+              <a:rPr lang="en-US" sz="1400" dirty="0">
+                <a:solidFill>
+                  <a:srgbClr val="1F2937"/>
+                </a:solidFill>
+                <a:latin typeface="Consolas"/>
+                <a:cs typeface="Consolas"/>
+              </a:rPr>
+              <a:t>      ))Marketing((</a:t>
+            </a:r>
+          </a:p>
+          <a:p>
+            <a:pPr algn="l"/>
+            <a:r>
+              <a:rPr lang="en-US" sz="1400" dirty="0">
+                <a:solidFill>
+                  <a:srgbClr val="1F2937"/>
+                </a:solidFill>
+                <a:latin typeface="Consolas"/>
+                <a:cs typeface="Consolas"/>
+              </a:rPr>
+              <a:t>      Support</a:t>
             </a:r>
           </a:p>
         </p:txBody>
